--- a/training-kit/pptx/Тема 2. Современные тенденции в EdTech.pptx
+++ b/training-kit/pptx/Тема 2. Современные тенденции в EdTech.pptx
@@ -19,6 +19,8 @@
     <p:sldId id="267" r:id="rId18"/>
     <p:sldId id="268" r:id="rId19"/>
     <p:sldId id="269" r:id="rId20"/>
+    <p:sldId id="270" r:id="rId21"/>
+    <p:sldId id="271" r:id="rId22"/>
   </p:sldIdLst>
   <p:sldSz cx="12191695" cy="6858000" type="screen4x3"/>
   <p:notesSz cx="6858000" cy="9144000"/>
@@ -3672,7 +3674,7 @@
                 <a:cs typeface="Calibri"/>
                 <a:ea typeface="Calibri"/>
               </a:rPr>
-              <a:t>Цель курса   ·   критерии   ·   пилот</a:t>
+              <a:t>Расширенный вариант  ·  модуль 52 академических часа</a:t>
             </a:r>
           </a:p>
         </p:txBody>
@@ -4042,7 +4044,7 @@
                 <a:cs typeface="Calibri"/>
                 <a:ea typeface="Calibri"/>
               </a:rPr>
-              <a:t>10  /  14</a:t>
+              <a:t>10  /  16</a:t>
             </a:r>
           </a:p>
         </p:txBody>
@@ -5192,7 +5194,7 @@
                 <a:cs typeface="Calibri"/>
                 <a:ea typeface="Calibri"/>
               </a:rPr>
-              <a:t>11  /  14</a:t>
+              <a:t>11  /  16</a:t>
             </a:r>
           </a:p>
         </p:txBody>
@@ -6567,7 +6569,7 @@
                 <a:cs typeface="Calibri"/>
                 <a:ea typeface="Calibri"/>
               </a:rPr>
-              <a:t>12  /  14</a:t>
+              <a:t>12  /  16</a:t>
             </a:r>
           </a:p>
         </p:txBody>
@@ -7191,7 +7193,7 @@
                 <a:cs typeface="Calibri"/>
                 <a:ea typeface="Calibri"/>
               </a:rPr>
-              <a:t>13  /  14</a:t>
+              <a:t>13  /  16</a:t>
             </a:r>
           </a:p>
         </p:txBody>
@@ -7790,7 +7792,7 @@
                 <a:cs typeface="Calibri"/>
                 <a:ea typeface="Calibri"/>
               </a:rPr>
-              <a:t>Самостоятельная работа</a:t>
+              <a:t>Дополнительно 2 академических часа</a:t>
             </a:r>
           </a:p>
         </p:txBody>
@@ -7966,7 +7968,2458 @@
                 <a:cs typeface="Calibri"/>
                 <a:ea typeface="Calibri"/>
               </a:rPr>
-              <a:t>14  /  14</a:t>
+              <a:t>14  /  16</a:t>
+            </a:r>
+          </a:p>
+        </p:txBody>
+      </p:sp>
+      <p:graphicFrame>
+        <p:nvGraphicFramePr>
+          <p:cNvPr id="10" name="Table 9"/>
+          <p:cNvGraphicFramePr>
+            <a:graphicFrameLocks noGrp="1"/>
+          </p:cNvGraphicFramePr>
+          <p:nvPr/>
+        </p:nvGraphicFramePr>
+        <p:xfrm>
+          <a:off x="438912" y="1261872"/>
+          <a:ext cx="11338560" cy="4709160"/>
+        </p:xfrm>
+        <a:graphic>
+          <a:graphicData uri="http://schemas.openxmlformats.org/drawingml/2006/table">
+            <a:tbl>
+              <a:tblPr firstRow="1" bandRow="1">
+                <a:tableStyleId>{5C22544A-7EE6-4342-B048-85BDC9FD1C3A}</a:tableStyleId>
+              </a:tblPr>
+              <a:tblGrid>
+                <a:gridCol w="3017520"/>
+                <a:gridCol w="1188720"/>
+                <a:gridCol w="7132320"/>
+              </a:tblGrid>
+              <a:tr h="941832">
+                <a:tc>
+                  <a:txBody>
+                    <a:bodyPr wrap="square" lIns="73152" rIns="73152" tIns="18288" bIns="18288" anchor="ctr"/>
+                    <a:lstStyle/>
+                    <a:p>
+                      <a:pPr algn="l">
+                        <a:lnSpc>
+                          <a:spcPct val="105000"/>
+                        </a:lnSpc>
+                        <a:spcBef>
+                          <a:spcPts val="0"/>
+                        </a:spcBef>
+                        <a:spcAft>
+                          <a:spcPts val="0"/>
+                        </a:spcAft>
+                      </a:pPr>
+                      <a:r>
+                        <a:rPr sz="1400" b="1">
+                          <a:solidFill>
+                            <a:srgbClr val="FFFFFF"/>
+                          </a:solidFill>
+                          <a:latin typeface="Calibri"/>
+                          <a:cs typeface="Calibri"/>
+                          <a:ea typeface="Calibri"/>
+                        </a:rPr>
+                        <a:t>Этап</a:t>
+                      </a:r>
+                    </a:p>
+                  </a:txBody>
+                  <a:tcPr anchor="ctr" marL="91440" marR="73152" marT="45720" marB="45720">
+                    <a:solidFill>
+                      <a:srgbClr val="0F172A"/>
+                    </a:solidFill>
+                    <a:lnL w="6350">
+                      <a:solidFill>
+                        <a:srgbClr val="E2E8F0"/>
+                      </a:solidFill>
+                    </a:lnL>
+                    <a:lnR w="6350">
+                      <a:solidFill>
+                        <a:srgbClr val="E2E8F0"/>
+                      </a:solidFill>
+                    </a:lnR>
+                    <a:lnT w="6350">
+                      <a:solidFill>
+                        <a:srgbClr val="E2E8F0"/>
+                      </a:solidFill>
+                    </a:lnT>
+                    <a:lnB w="6350">
+                      <a:solidFill>
+                        <a:srgbClr val="E2E8F0"/>
+                      </a:solidFill>
+                    </a:lnB>
+                  </a:tcPr>
+                </a:tc>
+                <a:tc>
+                  <a:txBody>
+                    <a:bodyPr wrap="square" lIns="73152" rIns="73152" tIns="18288" bIns="18288" anchor="ctr"/>
+                    <a:lstStyle/>
+                    <a:p>
+                      <a:pPr algn="l">
+                        <a:lnSpc>
+                          <a:spcPct val="105000"/>
+                        </a:lnSpc>
+                        <a:spcBef>
+                          <a:spcPts val="0"/>
+                        </a:spcBef>
+                        <a:spcAft>
+                          <a:spcPts val="0"/>
+                        </a:spcAft>
+                      </a:pPr>
+                      <a:r>
+                        <a:rPr sz="1400" b="1">
+                          <a:solidFill>
+                            <a:srgbClr val="FFFFFF"/>
+                          </a:solidFill>
+                          <a:latin typeface="Calibri"/>
+                          <a:cs typeface="Calibri"/>
+                          <a:ea typeface="Calibri"/>
+                        </a:rPr>
+                        <a:t>Мин.</a:t>
+                      </a:r>
+                    </a:p>
+                  </a:txBody>
+                  <a:tcPr anchor="ctr" marL="91440" marR="73152" marT="45720" marB="45720">
+                    <a:solidFill>
+                      <a:srgbClr val="0F172A"/>
+                    </a:solidFill>
+                    <a:lnL w="6350">
+                      <a:solidFill>
+                        <a:srgbClr val="E2E8F0"/>
+                      </a:solidFill>
+                    </a:lnL>
+                    <a:lnR w="6350">
+                      <a:solidFill>
+                        <a:srgbClr val="E2E8F0"/>
+                      </a:solidFill>
+                    </a:lnR>
+                    <a:lnT w="6350">
+                      <a:solidFill>
+                        <a:srgbClr val="E2E8F0"/>
+                      </a:solidFill>
+                    </a:lnT>
+                    <a:lnB w="6350">
+                      <a:solidFill>
+                        <a:srgbClr val="E2E8F0"/>
+                      </a:solidFill>
+                    </a:lnB>
+                  </a:tcPr>
+                </a:tc>
+                <a:tc>
+                  <a:txBody>
+                    <a:bodyPr wrap="square" lIns="73152" rIns="73152" tIns="18288" bIns="18288" anchor="ctr"/>
+                    <a:lstStyle/>
+                    <a:p>
+                      <a:pPr algn="l">
+                        <a:lnSpc>
+                          <a:spcPct val="105000"/>
+                        </a:lnSpc>
+                        <a:spcBef>
+                          <a:spcPts val="0"/>
+                        </a:spcBef>
+                        <a:spcAft>
+                          <a:spcPts val="0"/>
+                        </a:spcAft>
+                      </a:pPr>
+                      <a:r>
+                        <a:rPr sz="1400" b="1">
+                          <a:solidFill>
+                            <a:srgbClr val="FFFFFF"/>
+                          </a:solidFill>
+                          <a:latin typeface="Calibri"/>
+                          <a:cs typeface="Calibri"/>
+                          <a:ea typeface="Calibri"/>
+                        </a:rPr>
+                        <a:t>Что делаем</a:t>
+                      </a:r>
+                    </a:p>
+                  </a:txBody>
+                  <a:tcPr anchor="ctr" marL="91440" marR="73152" marT="45720" marB="45720">
+                    <a:solidFill>
+                      <a:srgbClr val="0F172A"/>
+                    </a:solidFill>
+                    <a:lnL w="6350">
+                      <a:solidFill>
+                        <a:srgbClr val="E2E8F0"/>
+                      </a:solidFill>
+                    </a:lnL>
+                    <a:lnR w="6350">
+                      <a:solidFill>
+                        <a:srgbClr val="E2E8F0"/>
+                      </a:solidFill>
+                    </a:lnR>
+                    <a:lnT w="6350">
+                      <a:solidFill>
+                        <a:srgbClr val="E2E8F0"/>
+                      </a:solidFill>
+                    </a:lnT>
+                    <a:lnB w="6350">
+                      <a:solidFill>
+                        <a:srgbClr val="E2E8F0"/>
+                      </a:solidFill>
+                    </a:lnB>
+                  </a:tcPr>
+                </a:tc>
+              </a:tr>
+              <a:tr h="941832">
+                <a:tc>
+                  <a:txBody>
+                    <a:bodyPr wrap="square" lIns="73152" rIns="73152" tIns="18288" bIns="18288" anchor="ctr"/>
+                    <a:lstStyle/>
+                    <a:p>
+                      <a:pPr algn="l">
+                        <a:lnSpc>
+                          <a:spcPct val="105000"/>
+                        </a:lnSpc>
+                        <a:spcBef>
+                          <a:spcPts val="0"/>
+                        </a:spcBef>
+                        <a:spcAft>
+                          <a:spcPts val="0"/>
+                        </a:spcAft>
+                      </a:pPr>
+                      <a:r>
+                        <a:rPr sz="1400" b="1">
+                          <a:solidFill>
+                            <a:srgbClr val="0F172A"/>
+                          </a:solidFill>
+                          <a:latin typeface="Calibri"/>
+                          <a:cs typeface="Calibri"/>
+                          <a:ea typeface="Calibri"/>
+                        </a:rPr>
+                        <a:t>Защита сравнения</a:t>
+                      </a:r>
+                    </a:p>
+                  </a:txBody>
+                  <a:tcPr anchor="ctr" marL="91440" marR="73152" marT="45720" marB="45720">
+                    <a:solidFill>
+                      <a:srgbClr val="FFFFFF"/>
+                    </a:solidFill>
+                    <a:lnL w="6350">
+                      <a:solidFill>
+                        <a:srgbClr val="E2E8F0"/>
+                      </a:solidFill>
+                    </a:lnL>
+                    <a:lnR w="6350">
+                      <a:solidFill>
+                        <a:srgbClr val="E2E8F0"/>
+                      </a:solidFill>
+                    </a:lnR>
+                    <a:lnT w="6350">
+                      <a:solidFill>
+                        <a:srgbClr val="E2E8F0"/>
+                      </a:solidFill>
+                    </a:lnT>
+                    <a:lnB w="6350">
+                      <a:solidFill>
+                        <a:srgbClr val="E2E8F0"/>
+                      </a:solidFill>
+                    </a:lnB>
+                  </a:tcPr>
+                </a:tc>
+                <a:tc>
+                  <a:txBody>
+                    <a:bodyPr wrap="square" lIns="73152" rIns="73152" tIns="18288" bIns="18288" anchor="ctr"/>
+                    <a:lstStyle/>
+                    <a:p>
+                      <a:pPr algn="l">
+                        <a:lnSpc>
+                          <a:spcPct val="105000"/>
+                        </a:lnSpc>
+                        <a:spcBef>
+                          <a:spcPts val="0"/>
+                        </a:spcBef>
+                        <a:spcAft>
+                          <a:spcPts val="0"/>
+                        </a:spcAft>
+                      </a:pPr>
+                      <a:r>
+                        <a:rPr sz="1400" b="0">
+                          <a:solidFill>
+                            <a:srgbClr val="0F172A"/>
+                          </a:solidFill>
+                          <a:latin typeface="Calibri"/>
+                          <a:cs typeface="Calibri"/>
+                          <a:ea typeface="Calibri"/>
+                        </a:rPr>
+                        <a:t>15</a:t>
+                      </a:r>
+                    </a:p>
+                  </a:txBody>
+                  <a:tcPr anchor="ctr" marL="91440" marR="73152" marT="45720" marB="45720">
+                    <a:solidFill>
+                      <a:srgbClr val="FFFFFF"/>
+                    </a:solidFill>
+                    <a:lnL w="6350">
+                      <a:solidFill>
+                        <a:srgbClr val="E2E8F0"/>
+                      </a:solidFill>
+                    </a:lnL>
+                    <a:lnR w="6350">
+                      <a:solidFill>
+                        <a:srgbClr val="E2E8F0"/>
+                      </a:solidFill>
+                    </a:lnR>
+                    <a:lnT w="6350">
+                      <a:solidFill>
+                        <a:srgbClr val="E2E8F0"/>
+                      </a:solidFill>
+                    </a:lnT>
+                    <a:lnB w="6350">
+                      <a:solidFill>
+                        <a:srgbClr val="E2E8F0"/>
+                      </a:solidFill>
+                    </a:lnB>
+                  </a:tcPr>
+                </a:tc>
+                <a:tc>
+                  <a:txBody>
+                    <a:bodyPr wrap="square" lIns="73152" rIns="73152" tIns="18288" bIns="18288" anchor="ctr"/>
+                    <a:lstStyle/>
+                    <a:p>
+                      <a:pPr algn="l">
+                        <a:lnSpc>
+                          <a:spcPct val="105000"/>
+                        </a:lnSpc>
+                        <a:spcBef>
+                          <a:spcPts val="0"/>
+                        </a:spcBef>
+                        <a:spcAft>
+                          <a:spcPts val="0"/>
+                        </a:spcAft>
+                      </a:pPr>
+                      <a:r>
+                        <a:rPr sz="1400" b="0">
+                          <a:solidFill>
+                            <a:srgbClr val="0F172A"/>
+                          </a:solidFill>
+                          <a:latin typeface="Calibri"/>
+                          <a:cs typeface="Calibri"/>
+                          <a:ea typeface="Calibri"/>
+                        </a:rPr>
+                        <a:t>Выбор платформы и один риск, который группа закрывает</a:t>
+                      </a:r>
+                    </a:p>
+                  </a:txBody>
+                  <a:tcPr anchor="ctr" marL="91440" marR="73152" marT="45720" marB="45720">
+                    <a:solidFill>
+                      <a:srgbClr val="FFFFFF"/>
+                    </a:solidFill>
+                    <a:lnL w="6350">
+                      <a:solidFill>
+                        <a:srgbClr val="E2E8F0"/>
+                      </a:solidFill>
+                    </a:lnL>
+                    <a:lnR w="6350">
+                      <a:solidFill>
+                        <a:srgbClr val="E2E8F0"/>
+                      </a:solidFill>
+                    </a:lnR>
+                    <a:lnT w="6350">
+                      <a:solidFill>
+                        <a:srgbClr val="E2E8F0"/>
+                      </a:solidFill>
+                    </a:lnT>
+                    <a:lnB w="6350">
+                      <a:solidFill>
+                        <a:srgbClr val="E2E8F0"/>
+                      </a:solidFill>
+                    </a:lnB>
+                  </a:tcPr>
+                </a:tc>
+              </a:tr>
+              <a:tr h="941832">
+                <a:tc>
+                  <a:txBody>
+                    <a:bodyPr wrap="square" lIns="73152" rIns="73152" tIns="18288" bIns="18288" anchor="ctr"/>
+                    <a:lstStyle/>
+                    <a:p>
+                      <a:pPr algn="l">
+                        <a:lnSpc>
+                          <a:spcPct val="105000"/>
+                        </a:lnSpc>
+                        <a:spcBef>
+                          <a:spcPts val="0"/>
+                        </a:spcBef>
+                        <a:spcAft>
+                          <a:spcPts val="0"/>
+                        </a:spcAft>
+                      </a:pPr>
+                      <a:r>
+                        <a:rPr sz="1400" b="1">
+                          <a:solidFill>
+                            <a:srgbClr val="0F172A"/>
+                          </a:solidFill>
+                          <a:latin typeface="Calibri"/>
+                          <a:cs typeface="Calibri"/>
+                          <a:ea typeface="Calibri"/>
+                        </a:rPr>
+                        <a:t>Сборка интерактива</a:t>
+                      </a:r>
+                    </a:p>
+                  </a:txBody>
+                  <a:tcPr anchor="ctr" marL="91440" marR="73152" marT="45720" marB="45720">
+                    <a:solidFill>
+                      <a:srgbClr val="F1F5F9"/>
+                    </a:solidFill>
+                    <a:lnL w="6350">
+                      <a:solidFill>
+                        <a:srgbClr val="E2E8F0"/>
+                      </a:solidFill>
+                    </a:lnL>
+                    <a:lnR w="6350">
+                      <a:solidFill>
+                        <a:srgbClr val="E2E8F0"/>
+                      </a:solidFill>
+                    </a:lnR>
+                    <a:lnT w="6350">
+                      <a:solidFill>
+                        <a:srgbClr val="E2E8F0"/>
+                      </a:solidFill>
+                    </a:lnT>
+                    <a:lnB w="6350">
+                      <a:solidFill>
+                        <a:srgbClr val="E2E8F0"/>
+                      </a:solidFill>
+                    </a:lnB>
+                  </a:tcPr>
+                </a:tc>
+                <a:tc>
+                  <a:txBody>
+                    <a:bodyPr wrap="square" lIns="73152" rIns="73152" tIns="18288" bIns="18288" anchor="ctr"/>
+                    <a:lstStyle/>
+                    <a:p>
+                      <a:pPr algn="l">
+                        <a:lnSpc>
+                          <a:spcPct val="105000"/>
+                        </a:lnSpc>
+                        <a:spcBef>
+                          <a:spcPts val="0"/>
+                        </a:spcBef>
+                        <a:spcAft>
+                          <a:spcPts val="0"/>
+                        </a:spcAft>
+                      </a:pPr>
+                      <a:r>
+                        <a:rPr sz="1400" b="0">
+                          <a:solidFill>
+                            <a:srgbClr val="0F172A"/>
+                          </a:solidFill>
+                          <a:latin typeface="Calibri"/>
+                          <a:cs typeface="Calibri"/>
+                          <a:ea typeface="Calibri"/>
+                        </a:rPr>
+                        <a:t>50</a:t>
+                      </a:r>
+                    </a:p>
+                  </a:txBody>
+                  <a:tcPr anchor="ctr" marL="91440" marR="73152" marT="45720" marB="45720">
+                    <a:solidFill>
+                      <a:srgbClr val="F1F5F9"/>
+                    </a:solidFill>
+                    <a:lnL w="6350">
+                      <a:solidFill>
+                        <a:srgbClr val="E2E8F0"/>
+                      </a:solidFill>
+                    </a:lnL>
+                    <a:lnR w="6350">
+                      <a:solidFill>
+                        <a:srgbClr val="E2E8F0"/>
+                      </a:solidFill>
+                    </a:lnR>
+                    <a:lnT w="6350">
+                      <a:solidFill>
+                        <a:srgbClr val="E2E8F0"/>
+                      </a:solidFill>
+                    </a:lnT>
+                    <a:lnB w="6350">
+                      <a:solidFill>
+                        <a:srgbClr val="E2E8F0"/>
+                      </a:solidFill>
+                    </a:lnB>
+                  </a:tcPr>
+                </a:tc>
+                <a:tc>
+                  <a:txBody>
+                    <a:bodyPr wrap="square" lIns="73152" rIns="73152" tIns="18288" bIns="18288" anchor="ctr"/>
+                    <a:lstStyle/>
+                    <a:p>
+                      <a:pPr algn="l">
+                        <a:lnSpc>
+                          <a:spcPct val="105000"/>
+                        </a:lnSpc>
+                        <a:spcBef>
+                          <a:spcPts val="0"/>
+                        </a:spcBef>
+                        <a:spcAft>
+                          <a:spcPts val="0"/>
+                        </a:spcAft>
+                      </a:pPr>
+                      <a:r>
+                        <a:rPr sz="1400" b="0">
+                          <a:solidFill>
+                            <a:srgbClr val="0F172A"/>
+                          </a:solidFill>
+                          <a:latin typeface="Calibri"/>
+                          <a:cs typeface="Calibri"/>
+                          <a:ea typeface="Calibri"/>
+                        </a:rPr>
+                        <a:t>В конструкторе один законченный элемент, не пустой каркас</a:t>
+                      </a:r>
+                    </a:p>
+                  </a:txBody>
+                  <a:tcPr anchor="ctr" marL="91440" marR="73152" marT="45720" marB="45720">
+                    <a:solidFill>
+                      <a:srgbClr val="F1F5F9"/>
+                    </a:solidFill>
+                    <a:lnL w="6350">
+                      <a:solidFill>
+                        <a:srgbClr val="E2E8F0"/>
+                      </a:solidFill>
+                    </a:lnL>
+                    <a:lnR w="6350">
+                      <a:solidFill>
+                        <a:srgbClr val="E2E8F0"/>
+                      </a:solidFill>
+                    </a:lnR>
+                    <a:lnT w="6350">
+                      <a:solidFill>
+                        <a:srgbClr val="E2E8F0"/>
+                      </a:solidFill>
+                    </a:lnT>
+                    <a:lnB w="6350">
+                      <a:solidFill>
+                        <a:srgbClr val="E2E8F0"/>
+                      </a:solidFill>
+                    </a:lnB>
+                  </a:tcPr>
+                </a:tc>
+              </a:tr>
+              <a:tr h="941832">
+                <a:tc>
+                  <a:txBody>
+                    <a:bodyPr wrap="square" lIns="73152" rIns="73152" tIns="18288" bIns="18288" anchor="ctr"/>
+                    <a:lstStyle/>
+                    <a:p>
+                      <a:pPr algn="l">
+                        <a:lnSpc>
+                          <a:spcPct val="105000"/>
+                        </a:lnSpc>
+                        <a:spcBef>
+                          <a:spcPts val="0"/>
+                        </a:spcBef>
+                        <a:spcAft>
+                          <a:spcPts val="0"/>
+                        </a:spcAft>
+                      </a:pPr>
+                      <a:r>
+                        <a:rPr sz="1400" b="1">
+                          <a:solidFill>
+                            <a:srgbClr val="0F172A"/>
+                          </a:solidFill>
+                          <a:latin typeface="Calibri"/>
+                          <a:cs typeface="Calibri"/>
+                          <a:ea typeface="Calibri"/>
+                        </a:rPr>
+                        <a:t>Взаимопроверка</a:t>
+                      </a:r>
+                    </a:p>
+                  </a:txBody>
+                  <a:tcPr anchor="ctr" marL="91440" marR="73152" marT="45720" marB="45720">
+                    <a:solidFill>
+                      <a:srgbClr val="FFFFFF"/>
+                    </a:solidFill>
+                    <a:lnL w="6350">
+                      <a:solidFill>
+                        <a:srgbClr val="E2E8F0"/>
+                      </a:solidFill>
+                    </a:lnL>
+                    <a:lnR w="6350">
+                      <a:solidFill>
+                        <a:srgbClr val="E2E8F0"/>
+                      </a:solidFill>
+                    </a:lnR>
+                    <a:lnT w="6350">
+                      <a:solidFill>
+                        <a:srgbClr val="E2E8F0"/>
+                      </a:solidFill>
+                    </a:lnT>
+                    <a:lnB w="6350">
+                      <a:solidFill>
+                        <a:srgbClr val="E2E8F0"/>
+                      </a:solidFill>
+                    </a:lnB>
+                  </a:tcPr>
+                </a:tc>
+                <a:tc>
+                  <a:txBody>
+                    <a:bodyPr wrap="square" lIns="73152" rIns="73152" tIns="18288" bIns="18288" anchor="ctr"/>
+                    <a:lstStyle/>
+                    <a:p>
+                      <a:pPr algn="l">
+                        <a:lnSpc>
+                          <a:spcPct val="105000"/>
+                        </a:lnSpc>
+                        <a:spcBef>
+                          <a:spcPts val="0"/>
+                        </a:spcBef>
+                        <a:spcAft>
+                          <a:spcPts val="0"/>
+                        </a:spcAft>
+                      </a:pPr>
+                      <a:r>
+                        <a:rPr sz="1400" b="0">
+                          <a:solidFill>
+                            <a:srgbClr val="0F172A"/>
+                          </a:solidFill>
+                          <a:latin typeface="Calibri"/>
+                          <a:cs typeface="Calibri"/>
+                          <a:ea typeface="Calibri"/>
+                        </a:rPr>
+                        <a:t>20</a:t>
+                      </a:r>
+                    </a:p>
+                  </a:txBody>
+                  <a:tcPr anchor="ctr" marL="91440" marR="73152" marT="45720" marB="45720">
+                    <a:solidFill>
+                      <a:srgbClr val="FFFFFF"/>
+                    </a:solidFill>
+                    <a:lnL w="6350">
+                      <a:solidFill>
+                        <a:srgbClr val="E2E8F0"/>
+                      </a:solidFill>
+                    </a:lnL>
+                    <a:lnR w="6350">
+                      <a:solidFill>
+                        <a:srgbClr val="E2E8F0"/>
+                      </a:solidFill>
+                    </a:lnR>
+                    <a:lnT w="6350">
+                      <a:solidFill>
+                        <a:srgbClr val="E2E8F0"/>
+                      </a:solidFill>
+                    </a:lnT>
+                    <a:lnB w="6350">
+                      <a:solidFill>
+                        <a:srgbClr val="E2E8F0"/>
+                      </a:solidFill>
+                    </a:lnB>
+                  </a:tcPr>
+                </a:tc>
+                <a:tc>
+                  <a:txBody>
+                    <a:bodyPr wrap="square" lIns="73152" rIns="73152" tIns="18288" bIns="18288" anchor="ctr"/>
+                    <a:lstStyle/>
+                    <a:p>
+                      <a:pPr algn="l">
+                        <a:lnSpc>
+                          <a:spcPct val="105000"/>
+                        </a:lnSpc>
+                        <a:spcBef>
+                          <a:spcPts val="0"/>
+                        </a:spcBef>
+                        <a:spcAft>
+                          <a:spcPts val="0"/>
+                        </a:spcAft>
+                      </a:pPr>
+                      <a:r>
+                        <a:rPr sz="1400" b="0">
+                          <a:solidFill>
+                            <a:srgbClr val="0F172A"/>
+                          </a:solidFill>
+                          <a:latin typeface="Calibri"/>
+                          <a:cs typeface="Calibri"/>
+                          <a:ea typeface="Calibri"/>
+                        </a:rPr>
+                        <a:t>Соседняя группа смотрит работу по семи критериям</a:t>
+                      </a:r>
+                    </a:p>
+                  </a:txBody>
+                  <a:tcPr anchor="ctr" marL="91440" marR="73152" marT="45720" marB="45720">
+                    <a:solidFill>
+                      <a:srgbClr val="FFFFFF"/>
+                    </a:solidFill>
+                    <a:lnL w="6350">
+                      <a:solidFill>
+                        <a:srgbClr val="E2E8F0"/>
+                      </a:solidFill>
+                    </a:lnL>
+                    <a:lnR w="6350">
+                      <a:solidFill>
+                        <a:srgbClr val="E2E8F0"/>
+                      </a:solidFill>
+                    </a:lnR>
+                    <a:lnT w="6350">
+                      <a:solidFill>
+                        <a:srgbClr val="E2E8F0"/>
+                      </a:solidFill>
+                    </a:lnT>
+                    <a:lnB w="6350">
+                      <a:solidFill>
+                        <a:srgbClr val="E2E8F0"/>
+                      </a:solidFill>
+                    </a:lnB>
+                  </a:tcPr>
+                </a:tc>
+              </a:tr>
+              <a:tr h="941832">
+                <a:tc>
+                  <a:txBody>
+                    <a:bodyPr wrap="square" lIns="73152" rIns="73152" tIns="18288" bIns="18288" anchor="ctr"/>
+                    <a:lstStyle/>
+                    <a:p>
+                      <a:pPr algn="l">
+                        <a:lnSpc>
+                          <a:spcPct val="105000"/>
+                        </a:lnSpc>
+                        <a:spcBef>
+                          <a:spcPts val="0"/>
+                        </a:spcBef>
+                        <a:spcAft>
+                          <a:spcPts val="0"/>
+                        </a:spcAft>
+                      </a:pPr>
+                      <a:r>
+                        <a:rPr sz="1400" b="1">
+                          <a:solidFill>
+                            <a:srgbClr val="0F172A"/>
+                          </a:solidFill>
+                          <a:latin typeface="Calibri"/>
+                          <a:cs typeface="Calibri"/>
+                          <a:ea typeface="Calibri"/>
+                        </a:rPr>
+                        <a:t>Решение о запуске</a:t>
+                      </a:r>
+                    </a:p>
+                  </a:txBody>
+                  <a:tcPr anchor="ctr" marL="91440" marR="73152" marT="45720" marB="45720">
+                    <a:solidFill>
+                      <a:srgbClr val="F1F5F9"/>
+                    </a:solidFill>
+                    <a:lnL w="6350">
+                      <a:solidFill>
+                        <a:srgbClr val="E2E8F0"/>
+                      </a:solidFill>
+                    </a:lnL>
+                    <a:lnR w="6350">
+                      <a:solidFill>
+                        <a:srgbClr val="E2E8F0"/>
+                      </a:solidFill>
+                    </a:lnR>
+                    <a:lnT w="6350">
+                      <a:solidFill>
+                        <a:srgbClr val="E2E8F0"/>
+                      </a:solidFill>
+                    </a:lnT>
+                    <a:lnB w="6350">
+                      <a:solidFill>
+                        <a:srgbClr val="E2E8F0"/>
+                      </a:solidFill>
+                    </a:lnB>
+                  </a:tcPr>
+                </a:tc>
+                <a:tc>
+                  <a:txBody>
+                    <a:bodyPr wrap="square" lIns="73152" rIns="73152" tIns="18288" bIns="18288" anchor="ctr"/>
+                    <a:lstStyle/>
+                    <a:p>
+                      <a:pPr algn="l">
+                        <a:lnSpc>
+                          <a:spcPct val="105000"/>
+                        </a:lnSpc>
+                        <a:spcBef>
+                          <a:spcPts val="0"/>
+                        </a:spcBef>
+                        <a:spcAft>
+                          <a:spcPts val="0"/>
+                        </a:spcAft>
+                      </a:pPr>
+                      <a:r>
+                        <a:rPr sz="1400" b="0">
+                          <a:solidFill>
+                            <a:srgbClr val="0F172A"/>
+                          </a:solidFill>
+                          <a:latin typeface="Calibri"/>
+                          <a:cs typeface="Calibri"/>
+                          <a:ea typeface="Calibri"/>
+                        </a:rPr>
+                        <a:t>5</a:t>
+                      </a:r>
+                    </a:p>
+                  </a:txBody>
+                  <a:tcPr anchor="ctr" marL="91440" marR="73152" marT="45720" marB="45720">
+                    <a:solidFill>
+                      <a:srgbClr val="F1F5F9"/>
+                    </a:solidFill>
+                    <a:lnL w="6350">
+                      <a:solidFill>
+                        <a:srgbClr val="E2E8F0"/>
+                      </a:solidFill>
+                    </a:lnL>
+                    <a:lnR w="6350">
+                      <a:solidFill>
+                        <a:srgbClr val="E2E8F0"/>
+                      </a:solidFill>
+                    </a:lnR>
+                    <a:lnT w="6350">
+                      <a:solidFill>
+                        <a:srgbClr val="E2E8F0"/>
+                      </a:solidFill>
+                    </a:lnT>
+                    <a:lnB w="6350">
+                      <a:solidFill>
+                        <a:srgbClr val="E2E8F0"/>
+                      </a:solidFill>
+                    </a:lnB>
+                  </a:tcPr>
+                </a:tc>
+                <a:tc>
+                  <a:txBody>
+                    <a:bodyPr wrap="square" lIns="73152" rIns="73152" tIns="18288" bIns="18288" anchor="ctr"/>
+                    <a:lstStyle/>
+                    <a:p>
+                      <a:pPr algn="l">
+                        <a:lnSpc>
+                          <a:spcPct val="105000"/>
+                        </a:lnSpc>
+                        <a:spcBef>
+                          <a:spcPts val="0"/>
+                        </a:spcBef>
+                        <a:spcAft>
+                          <a:spcPts val="0"/>
+                        </a:spcAft>
+                      </a:pPr>
+                      <a:r>
+                        <a:rPr sz="1400" b="0">
+                          <a:solidFill>
+                            <a:srgbClr val="0F172A"/>
+                          </a:solidFill>
+                          <a:latin typeface="Calibri"/>
+                          <a:cs typeface="Calibri"/>
+                          <a:ea typeface="Calibri"/>
+                        </a:rPr>
+                        <a:t>Что нужно закрыть до пилота</a:t>
+                      </a:r>
+                    </a:p>
+                  </a:txBody>
+                  <a:tcPr anchor="ctr" marL="91440" marR="73152" marT="45720" marB="45720">
+                    <a:solidFill>
+                      <a:srgbClr val="F1F5F9"/>
+                    </a:solidFill>
+                    <a:lnL w="6350">
+                      <a:solidFill>
+                        <a:srgbClr val="E2E8F0"/>
+                      </a:solidFill>
+                    </a:lnL>
+                    <a:lnR w="6350">
+                      <a:solidFill>
+                        <a:srgbClr val="E2E8F0"/>
+                      </a:solidFill>
+                    </a:lnR>
+                    <a:lnT w="6350">
+                      <a:solidFill>
+                        <a:srgbClr val="E2E8F0"/>
+                      </a:solidFill>
+                    </a:lnT>
+                    <a:lnB w="6350">
+                      <a:solidFill>
+                        <a:srgbClr val="E2E8F0"/>
+                      </a:solidFill>
+                    </a:lnB>
+                  </a:tcPr>
+                </a:tc>
+              </a:tr>
+            </a:tbl>
+          </a:graphicData>
+        </a:graphic>
+      </p:graphicFrame>
+      <p:sp>
+        <p:nvSpPr>
+          <p:cNvPr id="11" name="TextBox 10"/>
+          <p:cNvSpPr txBox="1"/>
+          <p:nvPr/>
+        </p:nvSpPr>
+        <p:spPr>
+          <a:xfrm>
+            <a:off x="457200" y="6053328"/>
+            <a:ext cx="11247120" cy="438912"/>
+          </a:xfrm>
+          <a:prstGeom prst="rect">
+            <a:avLst/>
+          </a:prstGeom>
+          <a:noFill/>
+        </p:spPr>
+        <p:txBody>
+          <a:bodyPr wrap="square" lIns="0" rIns="0" tIns="0" bIns="0" anchor="t"/>
+          <a:lstStyle/>
+          <a:p>
+            <a:pPr algn="l">
+              <a:lnSpc>
+                <a:spcPct val="105000"/>
+              </a:lnSpc>
+              <a:spcBef>
+                <a:spcPts val="0"/>
+              </a:spcBef>
+              <a:spcAft>
+                <a:spcPts val="0"/>
+              </a:spcAft>
+            </a:pPr>
+            <a:r>
+              <a:rPr sz="1400" b="0">
+                <a:solidFill>
+                  <a:srgbClr val="475569"/>
+                </a:solidFill>
+                <a:latin typeface="Calibri"/>
+                <a:cs typeface="Calibri"/>
+                <a:ea typeface="Calibri"/>
+              </a:rPr>
+              <a:t>Эти 90 минут добавлены к базовому объему темы. В этом варианте модуль длится 52 академических часа.</a:t>
+            </a:r>
+          </a:p>
+        </p:txBody>
+      </p:sp>
+    </p:spTree>
+  </p:cSld>
+  <p:clrMapOvr>
+    <a:masterClrMapping/>
+  </p:clrMapOvr>
+</p:sld>
+</file>
+
+<file path=ppt/slides/slide15.xml><?xml version="1.0" encoding="utf-8"?>
+<p:sld xmlns:a="http://schemas.openxmlformats.org/drawingml/2006/main" xmlns:p="http://schemas.openxmlformats.org/presentationml/2006/main" xmlns:r="http://schemas.openxmlformats.org/officeDocument/2006/relationships">
+  <p:cSld>
+    <p:spTree>
+      <p:nvGrpSpPr>
+        <p:cNvPr id="1" name=""/>
+        <p:cNvGrpSpPr/>
+        <p:nvPr/>
+      </p:nvGrpSpPr>
+      <p:grpSpPr/>
+      <p:sp>
+        <p:nvSpPr>
+          <p:cNvPr id="2" name="Rectangle 1"/>
+          <p:cNvSpPr/>
+          <p:nvPr/>
+        </p:nvSpPr>
+        <p:spPr>
+          <a:xfrm>
+            <a:off x="0" y="0"/>
+            <a:ext cx="12191695" cy="6858000"/>
+          </a:xfrm>
+          <a:prstGeom prst="rect">
+            <a:avLst/>
+          </a:prstGeom>
+          <a:solidFill>
+            <a:srgbClr val="F8FAFC"/>
+          </a:solidFill>
+          <a:ln>
+            <a:noFill/>
+          </a:ln>
+        </p:spPr>
+        <p:style>
+          <a:lnRef idx="1">
+            <a:schemeClr val="accent1"/>
+          </a:lnRef>
+          <a:fillRef idx="3">
+            <a:schemeClr val="accent1"/>
+          </a:fillRef>
+          <a:effectRef idx="2">
+            <a:schemeClr val="accent1"/>
+          </a:effectRef>
+          <a:fontRef idx="minor">
+            <a:schemeClr val="lt1"/>
+          </a:fontRef>
+        </p:style>
+        <p:txBody>
+          <a:bodyPr rtlCol="0" anchor="ctr"/>
+          <a:lstStyle/>
+          <a:p>
+            <a:pPr algn="ctr"/>
+          </a:p>
+        </p:txBody>
+      </p:sp>
+      <p:sp>
+        <p:nvSpPr>
+          <p:cNvPr id="3" name="Rectangle 2"/>
+          <p:cNvSpPr/>
+          <p:nvPr/>
+        </p:nvSpPr>
+        <p:spPr>
+          <a:xfrm>
+            <a:off x="0" y="0"/>
+            <a:ext cx="12191695" cy="73152"/>
+          </a:xfrm>
+          <a:prstGeom prst="rect">
+            <a:avLst/>
+          </a:prstGeom>
+          <a:solidFill>
+            <a:srgbClr val="2563EB"/>
+          </a:solidFill>
+          <a:ln>
+            <a:noFill/>
+          </a:ln>
+        </p:spPr>
+        <p:style>
+          <a:lnRef idx="1">
+            <a:schemeClr val="accent1"/>
+          </a:lnRef>
+          <a:fillRef idx="3">
+            <a:schemeClr val="accent1"/>
+          </a:fillRef>
+          <a:effectRef idx="2">
+            <a:schemeClr val="accent1"/>
+          </a:effectRef>
+          <a:fontRef idx="minor">
+            <a:schemeClr val="lt1"/>
+          </a:fontRef>
+        </p:style>
+        <p:txBody>
+          <a:bodyPr rtlCol="0" anchor="ctr"/>
+          <a:lstStyle/>
+          <a:p>
+            <a:pPr algn="ctr"/>
+          </a:p>
+        </p:txBody>
+      </p:sp>
+      <p:sp>
+        <p:nvSpPr>
+          <p:cNvPr id="4" name="TextBox 3"/>
+          <p:cNvSpPr txBox="1"/>
+          <p:nvPr/>
+        </p:nvSpPr>
+        <p:spPr>
+          <a:xfrm>
+            <a:off x="438912" y="182880"/>
+            <a:ext cx="9601200" cy="256032"/>
+          </a:xfrm>
+          <a:prstGeom prst="rect">
+            <a:avLst/>
+          </a:prstGeom>
+          <a:noFill/>
+        </p:spPr>
+        <p:txBody>
+          <a:bodyPr wrap="square" lIns="0" rIns="0" tIns="0" bIns="0" anchor="t"/>
+          <a:lstStyle/>
+          <a:p>
+            <a:pPr algn="l">
+              <a:lnSpc>
+                <a:spcPct val="105000"/>
+              </a:lnSpc>
+              <a:spcBef>
+                <a:spcPts val="0"/>
+              </a:spcBef>
+              <a:spcAft>
+                <a:spcPts val="0"/>
+              </a:spcAft>
+            </a:pPr>
+            <a:r>
+              <a:rPr sz="1200" b="1">
+                <a:solidFill>
+                  <a:srgbClr val="0F766E"/>
+                </a:solidFill>
+                <a:latin typeface="Calibri"/>
+                <a:cs typeface="Calibri"/>
+                <a:ea typeface="Calibri"/>
+              </a:rPr>
+              <a:t>ТЕМА 2   ·   EDTECH И ПЛАТФОРМЫ</a:t>
+            </a:r>
+          </a:p>
+        </p:txBody>
+      </p:sp>
+      <p:sp>
+        <p:nvSpPr>
+          <p:cNvPr id="5" name="TextBox 4"/>
+          <p:cNvSpPr txBox="1"/>
+          <p:nvPr/>
+        </p:nvSpPr>
+        <p:spPr>
+          <a:xfrm>
+            <a:off x="420624" y="420624"/>
+            <a:ext cx="11338560" cy="566928"/>
+          </a:xfrm>
+          <a:prstGeom prst="rect">
+            <a:avLst/>
+          </a:prstGeom>
+          <a:noFill/>
+        </p:spPr>
+        <p:txBody>
+          <a:bodyPr wrap="square" lIns="0" rIns="0" tIns="0" bIns="0" anchor="t"/>
+          <a:lstStyle/>
+          <a:p>
+            <a:pPr algn="l">
+              <a:lnSpc>
+                <a:spcPct val="105000"/>
+              </a:lnSpc>
+              <a:spcBef>
+                <a:spcPts val="0"/>
+              </a:spcBef>
+              <a:spcAft>
+                <a:spcPts val="0"/>
+              </a:spcAft>
+            </a:pPr>
+            <a:r>
+              <a:rPr sz="2800" b="1">
+                <a:solidFill>
+                  <a:srgbClr val="0F172A"/>
+                </a:solidFill>
+                <a:latin typeface="Calibri"/>
+                <a:cs typeface="Calibri"/>
+                <a:ea typeface="Calibri"/>
+              </a:rPr>
+              <a:t>Что должно быть готово за эти 90 минут</a:t>
+            </a:r>
+          </a:p>
+        </p:txBody>
+      </p:sp>
+      <p:sp>
+        <p:nvSpPr>
+          <p:cNvPr id="6" name="Rectangle 5"/>
+          <p:cNvSpPr/>
+          <p:nvPr/>
+        </p:nvSpPr>
+        <p:spPr>
+          <a:xfrm>
+            <a:off x="0" y="6601968"/>
+            <a:ext cx="12191695" cy="256032"/>
+          </a:xfrm>
+          <a:prstGeom prst="rect">
+            <a:avLst/>
+          </a:prstGeom>
+          <a:solidFill>
+            <a:srgbClr val="FFFFFF"/>
+          </a:solidFill>
+          <a:ln>
+            <a:noFill/>
+          </a:ln>
+        </p:spPr>
+        <p:style>
+          <a:lnRef idx="1">
+            <a:schemeClr val="accent1"/>
+          </a:lnRef>
+          <a:fillRef idx="3">
+            <a:schemeClr val="accent1"/>
+          </a:fillRef>
+          <a:effectRef idx="2">
+            <a:schemeClr val="accent1"/>
+          </a:effectRef>
+          <a:fontRef idx="minor">
+            <a:schemeClr val="lt1"/>
+          </a:fontRef>
+        </p:style>
+        <p:txBody>
+          <a:bodyPr rtlCol="0" anchor="ctr"/>
+          <a:lstStyle/>
+          <a:p>
+            <a:pPr algn="ctr"/>
+          </a:p>
+        </p:txBody>
+      </p:sp>
+      <p:sp>
+        <p:nvSpPr>
+          <p:cNvPr id="7" name="Rectangle 6"/>
+          <p:cNvSpPr/>
+          <p:nvPr/>
+        </p:nvSpPr>
+        <p:spPr>
+          <a:xfrm>
+            <a:off x="0" y="6601968"/>
+            <a:ext cx="12191695" cy="10972"/>
+          </a:xfrm>
+          <a:prstGeom prst="rect">
+            <a:avLst/>
+          </a:prstGeom>
+          <a:solidFill>
+            <a:srgbClr val="E2E8F0"/>
+          </a:solidFill>
+          <a:ln>
+            <a:noFill/>
+          </a:ln>
+        </p:spPr>
+        <p:style>
+          <a:lnRef idx="1">
+            <a:schemeClr val="accent1"/>
+          </a:lnRef>
+          <a:fillRef idx="3">
+            <a:schemeClr val="accent1"/>
+          </a:fillRef>
+          <a:effectRef idx="2">
+            <a:schemeClr val="accent1"/>
+          </a:effectRef>
+          <a:fontRef idx="minor">
+            <a:schemeClr val="lt1"/>
+          </a:fontRef>
+        </p:style>
+        <p:txBody>
+          <a:bodyPr rtlCol="0" anchor="ctr"/>
+          <a:lstStyle/>
+          <a:p>
+            <a:pPr algn="ctr"/>
+          </a:p>
+        </p:txBody>
+      </p:sp>
+      <p:sp>
+        <p:nvSpPr>
+          <p:cNvPr id="8" name="TextBox 7"/>
+          <p:cNvSpPr txBox="1"/>
+          <p:nvPr/>
+        </p:nvSpPr>
+        <p:spPr>
+          <a:xfrm>
+            <a:off x="438912" y="6620256"/>
+            <a:ext cx="7498079" cy="219456"/>
+          </a:xfrm>
+          <a:prstGeom prst="rect">
+            <a:avLst/>
+          </a:prstGeom>
+          <a:noFill/>
+        </p:spPr>
+        <p:txBody>
+          <a:bodyPr wrap="square" lIns="0" rIns="0" tIns="0" bIns="0" anchor="ctr"/>
+          <a:lstStyle/>
+          <a:p>
+            <a:pPr algn="l">
+              <a:lnSpc>
+                <a:spcPct val="105000"/>
+              </a:lnSpc>
+              <a:spcBef>
+                <a:spcPts val="0"/>
+              </a:spcBef>
+              <a:spcAft>
+                <a:spcPts val="0"/>
+              </a:spcAft>
+            </a:pPr>
+            <a:r>
+              <a:rPr sz="1100" b="0">
+                <a:solidFill>
+                  <a:srgbClr val="475569"/>
+                </a:solidFill>
+                <a:latin typeface="Calibri"/>
+                <a:cs typeface="Calibri"/>
+                <a:ea typeface="Calibri"/>
+              </a:rPr>
+              <a:t>Основы проектирования цифровых образовательных ресурсов</a:t>
+            </a:r>
+          </a:p>
+        </p:txBody>
+      </p:sp>
+      <p:sp>
+        <p:nvSpPr>
+          <p:cNvPr id="9" name="TextBox 8"/>
+          <p:cNvSpPr txBox="1"/>
+          <p:nvPr/>
+        </p:nvSpPr>
+        <p:spPr>
+          <a:xfrm>
+            <a:off x="9418320" y="6620256"/>
+            <a:ext cx="2331720" cy="219456"/>
+          </a:xfrm>
+          <a:prstGeom prst="rect">
+            <a:avLst/>
+          </a:prstGeom>
+          <a:noFill/>
+        </p:spPr>
+        <p:txBody>
+          <a:bodyPr wrap="square" lIns="0" rIns="0" tIns="0" bIns="0" anchor="ctr"/>
+          <a:lstStyle/>
+          <a:p>
+            <a:pPr algn="r">
+              <a:lnSpc>
+                <a:spcPct val="105000"/>
+              </a:lnSpc>
+              <a:spcBef>
+                <a:spcPts val="0"/>
+              </a:spcBef>
+              <a:spcAft>
+                <a:spcPts val="0"/>
+              </a:spcAft>
+            </a:pPr>
+            <a:r>
+              <a:rPr sz="1100" b="1">
+                <a:solidFill>
+                  <a:srgbClr val="475569"/>
+                </a:solidFill>
+                <a:latin typeface="Calibri"/>
+                <a:cs typeface="Calibri"/>
+                <a:ea typeface="Calibri"/>
+              </a:rPr>
+              <a:t>15  /  16</a:t>
+            </a:r>
+          </a:p>
+        </p:txBody>
+      </p:sp>
+      <p:sp>
+        <p:nvSpPr>
+          <p:cNvPr id="10" name="Rounded Rectangle 9"/>
+          <p:cNvSpPr/>
+          <p:nvPr/>
+        </p:nvSpPr>
+        <p:spPr>
+          <a:xfrm>
+            <a:off x="411480" y="1234440"/>
+            <a:ext cx="11356848" cy="841248"/>
+          </a:xfrm>
+          <a:prstGeom prst="roundRect">
+            <a:avLst>
+              <a:gd name="adj" fmla="val 12000"/>
+            </a:avLst>
+          </a:prstGeom>
+          <a:solidFill>
+            <a:srgbClr val="FFFFFF"/>
+          </a:solidFill>
+          <a:ln w="12700">
+            <a:solidFill>
+              <a:srgbClr val="E2E8F0"/>
+            </a:solidFill>
+          </a:ln>
+        </p:spPr>
+        <p:style>
+          <a:lnRef idx="1">
+            <a:schemeClr val="accent1"/>
+          </a:lnRef>
+          <a:fillRef idx="3">
+            <a:schemeClr val="accent1"/>
+          </a:fillRef>
+          <a:effectRef idx="2">
+            <a:schemeClr val="accent1"/>
+          </a:effectRef>
+          <a:fontRef idx="minor">
+            <a:schemeClr val="lt1"/>
+          </a:fontRef>
+        </p:style>
+        <p:txBody>
+          <a:bodyPr rtlCol="0" anchor="ctr"/>
+          <a:lstStyle/>
+          <a:p>
+            <a:pPr algn="ctr"/>
+          </a:p>
+        </p:txBody>
+      </p:sp>
+      <p:sp>
+        <p:nvSpPr>
+          <p:cNvPr id="11" name="Rectangle 10"/>
+          <p:cNvSpPr/>
+          <p:nvPr/>
+        </p:nvSpPr>
+        <p:spPr>
+          <a:xfrm>
+            <a:off x="411480" y="1234440"/>
+            <a:ext cx="91440" cy="841248"/>
+          </a:xfrm>
+          <a:prstGeom prst="rect">
+            <a:avLst/>
+          </a:prstGeom>
+          <a:solidFill>
+            <a:srgbClr val="0F766E"/>
+          </a:solidFill>
+          <a:ln>
+            <a:noFill/>
+          </a:ln>
+        </p:spPr>
+        <p:style>
+          <a:lnRef idx="1">
+            <a:schemeClr val="accent1"/>
+          </a:lnRef>
+          <a:fillRef idx="3">
+            <a:schemeClr val="accent1"/>
+          </a:fillRef>
+          <a:effectRef idx="2">
+            <a:schemeClr val="accent1"/>
+          </a:effectRef>
+          <a:fontRef idx="minor">
+            <a:schemeClr val="lt1"/>
+          </a:fontRef>
+        </p:style>
+        <p:txBody>
+          <a:bodyPr rtlCol="0" anchor="ctr"/>
+          <a:lstStyle/>
+          <a:p>
+            <a:pPr algn="ctr"/>
+          </a:p>
+        </p:txBody>
+      </p:sp>
+      <p:sp>
+        <p:nvSpPr>
+          <p:cNvPr id="12" name="Rounded Rectangle 11"/>
+          <p:cNvSpPr/>
+          <p:nvPr/>
+        </p:nvSpPr>
+        <p:spPr>
+          <a:xfrm>
+            <a:off x="676656" y="1472184"/>
+            <a:ext cx="1051560" cy="365760"/>
+          </a:xfrm>
+          <a:prstGeom prst="roundRect">
+            <a:avLst>
+              <a:gd name="adj" fmla="val 40000"/>
+            </a:avLst>
+          </a:prstGeom>
+          <a:solidFill>
+            <a:srgbClr val="F0FDFA"/>
+          </a:solidFill>
+          <a:ln>
+            <a:noFill/>
+          </a:ln>
+        </p:spPr>
+        <p:style>
+          <a:lnRef idx="1">
+            <a:schemeClr val="accent1"/>
+          </a:lnRef>
+          <a:fillRef idx="3">
+            <a:schemeClr val="accent1"/>
+          </a:fillRef>
+          <a:effectRef idx="2">
+            <a:schemeClr val="accent1"/>
+          </a:effectRef>
+          <a:fontRef idx="minor">
+            <a:schemeClr val="lt1"/>
+          </a:fontRef>
+        </p:style>
+        <p:txBody>
+          <a:bodyPr rtlCol="0" anchor="ctr" wrap="square" lIns="0" rIns="0" tIns="0" bIns="0"/>
+          <a:lstStyle/>
+          <a:p>
+            <a:pPr algn="ctr">
+              <a:lnSpc>
+                <a:spcPct val="105000"/>
+              </a:lnSpc>
+              <a:spcBef>
+                <a:spcPts val="0"/>
+              </a:spcBef>
+              <a:spcAft>
+                <a:spcPts val="0"/>
+              </a:spcAft>
+            </a:pPr>
+            <a:r>
+              <a:rPr sz="1300" b="1">
+                <a:solidFill>
+                  <a:srgbClr val="0F766E"/>
+                </a:solidFill>
+                <a:latin typeface="Calibri"/>
+                <a:cs typeface="Calibri"/>
+                <a:ea typeface="Calibri"/>
+              </a:rPr>
+              <a:t>01</a:t>
+            </a:r>
+          </a:p>
+        </p:txBody>
+      </p:sp>
+      <p:sp>
+        <p:nvSpPr>
+          <p:cNvPr id="13" name="TextBox 12"/>
+          <p:cNvSpPr txBox="1"/>
+          <p:nvPr/>
+        </p:nvSpPr>
+        <p:spPr>
+          <a:xfrm>
+            <a:off x="1874519" y="1234440"/>
+            <a:ext cx="9601200" cy="841248"/>
+          </a:xfrm>
+          <a:prstGeom prst="rect">
+            <a:avLst/>
+          </a:prstGeom>
+          <a:noFill/>
+        </p:spPr>
+        <p:txBody>
+          <a:bodyPr wrap="square" lIns="73152" rIns="146304" tIns="0" bIns="0" anchor="ctr"/>
+          <a:lstStyle/>
+          <a:p>
+            <a:pPr algn="l">
+              <a:lnSpc>
+                <a:spcPct val="105000"/>
+              </a:lnSpc>
+              <a:spcBef>
+                <a:spcPts val="0"/>
+              </a:spcBef>
+              <a:spcAft>
+                <a:spcPts val="0"/>
+              </a:spcAft>
+            </a:pPr>
+            <a:r>
+              <a:rPr sz="1600" b="0">
+                <a:solidFill>
+                  <a:srgbClr val="0F172A"/>
+                </a:solidFill>
+                <a:latin typeface="Calibri"/>
+                <a:cs typeface="Calibri"/>
+                <a:ea typeface="Calibri"/>
+              </a:rPr>
+              <a:t>Сравнительная матрица с весами и итогом</a:t>
+            </a:r>
+          </a:p>
+        </p:txBody>
+      </p:sp>
+      <p:sp>
+        <p:nvSpPr>
+          <p:cNvPr id="14" name="Rounded Rectangle 13"/>
+          <p:cNvSpPr/>
+          <p:nvPr/>
+        </p:nvSpPr>
+        <p:spPr>
+          <a:xfrm>
+            <a:off x="411480" y="2185416"/>
+            <a:ext cx="11356848" cy="841248"/>
+          </a:xfrm>
+          <a:prstGeom prst="roundRect">
+            <a:avLst>
+              <a:gd name="adj" fmla="val 12000"/>
+            </a:avLst>
+          </a:prstGeom>
+          <a:solidFill>
+            <a:srgbClr val="FFFFFF"/>
+          </a:solidFill>
+          <a:ln w="12700">
+            <a:solidFill>
+              <a:srgbClr val="E2E8F0"/>
+            </a:solidFill>
+          </a:ln>
+        </p:spPr>
+        <p:style>
+          <a:lnRef idx="1">
+            <a:schemeClr val="accent1"/>
+          </a:lnRef>
+          <a:fillRef idx="3">
+            <a:schemeClr val="accent1"/>
+          </a:fillRef>
+          <a:effectRef idx="2">
+            <a:schemeClr val="accent1"/>
+          </a:effectRef>
+          <a:fontRef idx="minor">
+            <a:schemeClr val="lt1"/>
+          </a:fontRef>
+        </p:style>
+        <p:txBody>
+          <a:bodyPr rtlCol="0" anchor="ctr"/>
+          <a:lstStyle/>
+          <a:p>
+            <a:pPr algn="ctr"/>
+          </a:p>
+        </p:txBody>
+      </p:sp>
+      <p:sp>
+        <p:nvSpPr>
+          <p:cNvPr id="15" name="Rectangle 14"/>
+          <p:cNvSpPr/>
+          <p:nvPr/>
+        </p:nvSpPr>
+        <p:spPr>
+          <a:xfrm>
+            <a:off x="411480" y="2185416"/>
+            <a:ext cx="91440" cy="841248"/>
+          </a:xfrm>
+          <a:prstGeom prst="rect">
+            <a:avLst/>
+          </a:prstGeom>
+          <a:solidFill>
+            <a:srgbClr val="0F766E"/>
+          </a:solidFill>
+          <a:ln>
+            <a:noFill/>
+          </a:ln>
+        </p:spPr>
+        <p:style>
+          <a:lnRef idx="1">
+            <a:schemeClr val="accent1"/>
+          </a:lnRef>
+          <a:fillRef idx="3">
+            <a:schemeClr val="accent1"/>
+          </a:fillRef>
+          <a:effectRef idx="2">
+            <a:schemeClr val="accent1"/>
+          </a:effectRef>
+          <a:fontRef idx="minor">
+            <a:schemeClr val="lt1"/>
+          </a:fontRef>
+        </p:style>
+        <p:txBody>
+          <a:bodyPr rtlCol="0" anchor="ctr"/>
+          <a:lstStyle/>
+          <a:p>
+            <a:pPr algn="ctr"/>
+          </a:p>
+        </p:txBody>
+      </p:sp>
+      <p:sp>
+        <p:nvSpPr>
+          <p:cNvPr id="16" name="Rounded Rectangle 15"/>
+          <p:cNvSpPr/>
+          <p:nvPr/>
+        </p:nvSpPr>
+        <p:spPr>
+          <a:xfrm>
+            <a:off x="676656" y="2423160"/>
+            <a:ext cx="1051560" cy="365760"/>
+          </a:xfrm>
+          <a:prstGeom prst="roundRect">
+            <a:avLst>
+              <a:gd name="adj" fmla="val 40000"/>
+            </a:avLst>
+          </a:prstGeom>
+          <a:solidFill>
+            <a:srgbClr val="F0FDFA"/>
+          </a:solidFill>
+          <a:ln>
+            <a:noFill/>
+          </a:ln>
+        </p:spPr>
+        <p:style>
+          <a:lnRef idx="1">
+            <a:schemeClr val="accent1"/>
+          </a:lnRef>
+          <a:fillRef idx="3">
+            <a:schemeClr val="accent1"/>
+          </a:fillRef>
+          <a:effectRef idx="2">
+            <a:schemeClr val="accent1"/>
+          </a:effectRef>
+          <a:fontRef idx="minor">
+            <a:schemeClr val="lt1"/>
+          </a:fontRef>
+        </p:style>
+        <p:txBody>
+          <a:bodyPr rtlCol="0" anchor="ctr" wrap="square" lIns="0" rIns="0" tIns="0" bIns="0"/>
+          <a:lstStyle/>
+          <a:p>
+            <a:pPr algn="ctr">
+              <a:lnSpc>
+                <a:spcPct val="105000"/>
+              </a:lnSpc>
+              <a:spcBef>
+                <a:spcPts val="0"/>
+              </a:spcBef>
+              <a:spcAft>
+                <a:spcPts val="0"/>
+              </a:spcAft>
+            </a:pPr>
+            <a:r>
+              <a:rPr sz="1300" b="1">
+                <a:solidFill>
+                  <a:srgbClr val="0F766E"/>
+                </a:solidFill>
+                <a:latin typeface="Calibri"/>
+                <a:cs typeface="Calibri"/>
+                <a:ea typeface="Calibri"/>
+              </a:rPr>
+              <a:t>02</a:t>
+            </a:r>
+          </a:p>
+        </p:txBody>
+      </p:sp>
+      <p:sp>
+        <p:nvSpPr>
+          <p:cNvPr id="17" name="TextBox 16"/>
+          <p:cNvSpPr txBox="1"/>
+          <p:nvPr/>
+        </p:nvSpPr>
+        <p:spPr>
+          <a:xfrm>
+            <a:off x="1874519" y="2185416"/>
+            <a:ext cx="9601200" cy="841248"/>
+          </a:xfrm>
+          <a:prstGeom prst="rect">
+            <a:avLst/>
+          </a:prstGeom>
+          <a:noFill/>
+        </p:spPr>
+        <p:txBody>
+          <a:bodyPr wrap="square" lIns="73152" rIns="146304" tIns="0" bIns="0" anchor="ctr"/>
+          <a:lstStyle/>
+          <a:p>
+            <a:pPr algn="l">
+              <a:lnSpc>
+                <a:spcPct val="105000"/>
+              </a:lnSpc>
+              <a:spcBef>
+                <a:spcPts val="0"/>
+              </a:spcBef>
+              <a:spcAft>
+                <a:spcPts val="0"/>
+              </a:spcAft>
+            </a:pPr>
+            <a:r>
+              <a:rPr sz="1600" b="0">
+                <a:solidFill>
+                  <a:srgbClr val="0F172A"/>
+                </a:solidFill>
+                <a:latin typeface="Calibri"/>
+                <a:cs typeface="Calibri"/>
+                <a:ea typeface="Calibri"/>
+              </a:rPr>
+              <a:t>Один интерактив, который можно пройти до конца</a:t>
+            </a:r>
+          </a:p>
+        </p:txBody>
+      </p:sp>
+      <p:sp>
+        <p:nvSpPr>
+          <p:cNvPr id="18" name="Rounded Rectangle 17"/>
+          <p:cNvSpPr/>
+          <p:nvPr/>
+        </p:nvSpPr>
+        <p:spPr>
+          <a:xfrm>
+            <a:off x="411480" y="3136392"/>
+            <a:ext cx="11356848" cy="841248"/>
+          </a:xfrm>
+          <a:prstGeom prst="roundRect">
+            <a:avLst>
+              <a:gd name="adj" fmla="val 12000"/>
+            </a:avLst>
+          </a:prstGeom>
+          <a:solidFill>
+            <a:srgbClr val="FFFFFF"/>
+          </a:solidFill>
+          <a:ln w="12700">
+            <a:solidFill>
+              <a:srgbClr val="E2E8F0"/>
+            </a:solidFill>
+          </a:ln>
+        </p:spPr>
+        <p:style>
+          <a:lnRef idx="1">
+            <a:schemeClr val="accent1"/>
+          </a:lnRef>
+          <a:fillRef idx="3">
+            <a:schemeClr val="accent1"/>
+          </a:fillRef>
+          <a:effectRef idx="2">
+            <a:schemeClr val="accent1"/>
+          </a:effectRef>
+          <a:fontRef idx="minor">
+            <a:schemeClr val="lt1"/>
+          </a:fontRef>
+        </p:style>
+        <p:txBody>
+          <a:bodyPr rtlCol="0" anchor="ctr"/>
+          <a:lstStyle/>
+          <a:p>
+            <a:pPr algn="ctr"/>
+          </a:p>
+        </p:txBody>
+      </p:sp>
+      <p:sp>
+        <p:nvSpPr>
+          <p:cNvPr id="19" name="Rectangle 18"/>
+          <p:cNvSpPr/>
+          <p:nvPr/>
+        </p:nvSpPr>
+        <p:spPr>
+          <a:xfrm>
+            <a:off x="411480" y="3136392"/>
+            <a:ext cx="91440" cy="841248"/>
+          </a:xfrm>
+          <a:prstGeom prst="rect">
+            <a:avLst/>
+          </a:prstGeom>
+          <a:solidFill>
+            <a:srgbClr val="0F766E"/>
+          </a:solidFill>
+          <a:ln>
+            <a:noFill/>
+          </a:ln>
+        </p:spPr>
+        <p:style>
+          <a:lnRef idx="1">
+            <a:schemeClr val="accent1"/>
+          </a:lnRef>
+          <a:fillRef idx="3">
+            <a:schemeClr val="accent1"/>
+          </a:fillRef>
+          <a:effectRef idx="2">
+            <a:schemeClr val="accent1"/>
+          </a:effectRef>
+          <a:fontRef idx="minor">
+            <a:schemeClr val="lt1"/>
+          </a:fontRef>
+        </p:style>
+        <p:txBody>
+          <a:bodyPr rtlCol="0" anchor="ctr"/>
+          <a:lstStyle/>
+          <a:p>
+            <a:pPr algn="ctr"/>
+          </a:p>
+        </p:txBody>
+      </p:sp>
+      <p:sp>
+        <p:nvSpPr>
+          <p:cNvPr id="20" name="Rounded Rectangle 19"/>
+          <p:cNvSpPr/>
+          <p:nvPr/>
+        </p:nvSpPr>
+        <p:spPr>
+          <a:xfrm>
+            <a:off x="676656" y="3374136"/>
+            <a:ext cx="1051560" cy="365760"/>
+          </a:xfrm>
+          <a:prstGeom prst="roundRect">
+            <a:avLst>
+              <a:gd name="adj" fmla="val 40000"/>
+            </a:avLst>
+          </a:prstGeom>
+          <a:solidFill>
+            <a:srgbClr val="F0FDFA"/>
+          </a:solidFill>
+          <a:ln>
+            <a:noFill/>
+          </a:ln>
+        </p:spPr>
+        <p:style>
+          <a:lnRef idx="1">
+            <a:schemeClr val="accent1"/>
+          </a:lnRef>
+          <a:fillRef idx="3">
+            <a:schemeClr val="accent1"/>
+          </a:fillRef>
+          <a:effectRef idx="2">
+            <a:schemeClr val="accent1"/>
+          </a:effectRef>
+          <a:fontRef idx="minor">
+            <a:schemeClr val="lt1"/>
+          </a:fontRef>
+        </p:style>
+        <p:txBody>
+          <a:bodyPr rtlCol="0" anchor="ctr" wrap="square" lIns="0" rIns="0" tIns="0" bIns="0"/>
+          <a:lstStyle/>
+          <a:p>
+            <a:pPr algn="ctr">
+              <a:lnSpc>
+                <a:spcPct val="105000"/>
+              </a:lnSpc>
+              <a:spcBef>
+                <a:spcPts val="0"/>
+              </a:spcBef>
+              <a:spcAft>
+                <a:spcPts val="0"/>
+              </a:spcAft>
+            </a:pPr>
+            <a:r>
+              <a:rPr sz="1300" b="1">
+                <a:solidFill>
+                  <a:srgbClr val="0F766E"/>
+                </a:solidFill>
+                <a:latin typeface="Calibri"/>
+                <a:cs typeface="Calibri"/>
+                <a:ea typeface="Calibri"/>
+              </a:rPr>
+              <a:t>03</a:t>
+            </a:r>
+          </a:p>
+        </p:txBody>
+      </p:sp>
+      <p:sp>
+        <p:nvSpPr>
+          <p:cNvPr id="21" name="TextBox 20"/>
+          <p:cNvSpPr txBox="1"/>
+          <p:nvPr/>
+        </p:nvSpPr>
+        <p:spPr>
+          <a:xfrm>
+            <a:off x="1874519" y="3136392"/>
+            <a:ext cx="9601200" cy="841248"/>
+          </a:xfrm>
+          <a:prstGeom prst="rect">
+            <a:avLst/>
+          </a:prstGeom>
+          <a:noFill/>
+        </p:spPr>
+        <p:txBody>
+          <a:bodyPr wrap="square" lIns="73152" rIns="146304" tIns="0" bIns="0" anchor="ctr"/>
+          <a:lstStyle/>
+          <a:p>
+            <a:pPr algn="l">
+              <a:lnSpc>
+                <a:spcPct val="105000"/>
+              </a:lnSpc>
+              <a:spcBef>
+                <a:spcPts val="0"/>
+              </a:spcBef>
+              <a:spcAft>
+                <a:spcPts val="0"/>
+              </a:spcAft>
+            </a:pPr>
+            <a:r>
+              <a:rPr sz="1600" b="0">
+                <a:solidFill>
+                  <a:srgbClr val="0F172A"/>
+                </a:solidFill>
+                <a:latin typeface="Calibri"/>
+                <a:cs typeface="Calibri"/>
+                <a:ea typeface="Calibri"/>
+              </a:rPr>
+              <a:t>Письменный комментарий соседней группы</a:t>
+            </a:r>
+          </a:p>
+        </p:txBody>
+      </p:sp>
+      <p:sp>
+        <p:nvSpPr>
+          <p:cNvPr id="22" name="Rounded Rectangle 21"/>
+          <p:cNvSpPr/>
+          <p:nvPr/>
+        </p:nvSpPr>
+        <p:spPr>
+          <a:xfrm>
+            <a:off x="411480" y="4087368"/>
+            <a:ext cx="11356848" cy="841248"/>
+          </a:xfrm>
+          <a:prstGeom prst="roundRect">
+            <a:avLst>
+              <a:gd name="adj" fmla="val 12000"/>
+            </a:avLst>
+          </a:prstGeom>
+          <a:solidFill>
+            <a:srgbClr val="FFFFFF"/>
+          </a:solidFill>
+          <a:ln w="12700">
+            <a:solidFill>
+              <a:srgbClr val="E2E8F0"/>
+            </a:solidFill>
+          </a:ln>
+        </p:spPr>
+        <p:style>
+          <a:lnRef idx="1">
+            <a:schemeClr val="accent1"/>
+          </a:lnRef>
+          <a:fillRef idx="3">
+            <a:schemeClr val="accent1"/>
+          </a:fillRef>
+          <a:effectRef idx="2">
+            <a:schemeClr val="accent1"/>
+          </a:effectRef>
+          <a:fontRef idx="minor">
+            <a:schemeClr val="lt1"/>
+          </a:fontRef>
+        </p:style>
+        <p:txBody>
+          <a:bodyPr rtlCol="0" anchor="ctr"/>
+          <a:lstStyle/>
+          <a:p>
+            <a:pPr algn="ctr"/>
+          </a:p>
+        </p:txBody>
+      </p:sp>
+      <p:sp>
+        <p:nvSpPr>
+          <p:cNvPr id="23" name="Rectangle 22"/>
+          <p:cNvSpPr/>
+          <p:nvPr/>
+        </p:nvSpPr>
+        <p:spPr>
+          <a:xfrm>
+            <a:off x="411480" y="4087368"/>
+            <a:ext cx="91440" cy="841248"/>
+          </a:xfrm>
+          <a:prstGeom prst="rect">
+            <a:avLst/>
+          </a:prstGeom>
+          <a:solidFill>
+            <a:srgbClr val="0F766E"/>
+          </a:solidFill>
+          <a:ln>
+            <a:noFill/>
+          </a:ln>
+        </p:spPr>
+        <p:style>
+          <a:lnRef idx="1">
+            <a:schemeClr val="accent1"/>
+          </a:lnRef>
+          <a:fillRef idx="3">
+            <a:schemeClr val="accent1"/>
+          </a:fillRef>
+          <a:effectRef idx="2">
+            <a:schemeClr val="accent1"/>
+          </a:effectRef>
+          <a:fontRef idx="minor">
+            <a:schemeClr val="lt1"/>
+          </a:fontRef>
+        </p:style>
+        <p:txBody>
+          <a:bodyPr rtlCol="0" anchor="ctr"/>
+          <a:lstStyle/>
+          <a:p>
+            <a:pPr algn="ctr"/>
+          </a:p>
+        </p:txBody>
+      </p:sp>
+      <p:sp>
+        <p:nvSpPr>
+          <p:cNvPr id="24" name="Rounded Rectangle 23"/>
+          <p:cNvSpPr/>
+          <p:nvPr/>
+        </p:nvSpPr>
+        <p:spPr>
+          <a:xfrm>
+            <a:off x="676656" y="4325112"/>
+            <a:ext cx="1051560" cy="365760"/>
+          </a:xfrm>
+          <a:prstGeom prst="roundRect">
+            <a:avLst>
+              <a:gd name="adj" fmla="val 40000"/>
+            </a:avLst>
+          </a:prstGeom>
+          <a:solidFill>
+            <a:srgbClr val="F0FDFA"/>
+          </a:solidFill>
+          <a:ln>
+            <a:noFill/>
+          </a:ln>
+        </p:spPr>
+        <p:style>
+          <a:lnRef idx="1">
+            <a:schemeClr val="accent1"/>
+          </a:lnRef>
+          <a:fillRef idx="3">
+            <a:schemeClr val="accent1"/>
+          </a:fillRef>
+          <a:effectRef idx="2">
+            <a:schemeClr val="accent1"/>
+          </a:effectRef>
+          <a:fontRef idx="minor">
+            <a:schemeClr val="lt1"/>
+          </a:fontRef>
+        </p:style>
+        <p:txBody>
+          <a:bodyPr rtlCol="0" anchor="ctr" wrap="square" lIns="0" rIns="0" tIns="0" bIns="0"/>
+          <a:lstStyle/>
+          <a:p>
+            <a:pPr algn="ctr">
+              <a:lnSpc>
+                <a:spcPct val="105000"/>
+              </a:lnSpc>
+              <a:spcBef>
+                <a:spcPts val="0"/>
+              </a:spcBef>
+              <a:spcAft>
+                <a:spcPts val="0"/>
+              </a:spcAft>
+            </a:pPr>
+            <a:r>
+              <a:rPr sz="1300" b="1">
+                <a:solidFill>
+                  <a:srgbClr val="0F766E"/>
+                </a:solidFill>
+                <a:latin typeface="Calibri"/>
+                <a:cs typeface="Calibri"/>
+                <a:ea typeface="Calibri"/>
+              </a:rPr>
+              <a:t>04</a:t>
+            </a:r>
+          </a:p>
+        </p:txBody>
+      </p:sp>
+      <p:sp>
+        <p:nvSpPr>
+          <p:cNvPr id="25" name="TextBox 24"/>
+          <p:cNvSpPr txBox="1"/>
+          <p:nvPr/>
+        </p:nvSpPr>
+        <p:spPr>
+          <a:xfrm>
+            <a:off x="1874519" y="4087368"/>
+            <a:ext cx="9601200" cy="841248"/>
+          </a:xfrm>
+          <a:prstGeom prst="rect">
+            <a:avLst/>
+          </a:prstGeom>
+          <a:noFill/>
+        </p:spPr>
+        <p:txBody>
+          <a:bodyPr wrap="square" lIns="73152" rIns="146304" tIns="0" bIns="0" anchor="ctr"/>
+          <a:lstStyle/>
+          <a:p>
+            <a:pPr algn="l">
+              <a:lnSpc>
+                <a:spcPct val="105000"/>
+              </a:lnSpc>
+              <a:spcBef>
+                <a:spcPts val="0"/>
+              </a:spcBef>
+              <a:spcAft>
+                <a:spcPts val="0"/>
+              </a:spcAft>
+            </a:pPr>
+            <a:r>
+              <a:rPr sz="1600" b="0">
+                <a:solidFill>
+                  <a:srgbClr val="0F172A"/>
+                </a:solidFill>
+                <a:latin typeface="Calibri"/>
+                <a:cs typeface="Calibri"/>
+                <a:ea typeface="Calibri"/>
+              </a:rPr>
+              <a:t>Список рисков запуска с мерой на каждый риск</a:t>
+            </a:r>
+          </a:p>
+        </p:txBody>
+      </p:sp>
+    </p:spTree>
+  </p:cSld>
+  <p:clrMapOvr>
+    <a:masterClrMapping/>
+  </p:clrMapOvr>
+</p:sld>
+</file>
+
+<file path=ppt/slides/slide16.xml><?xml version="1.0" encoding="utf-8"?>
+<p:sld xmlns:a="http://schemas.openxmlformats.org/drawingml/2006/main" xmlns:p="http://schemas.openxmlformats.org/presentationml/2006/main" xmlns:r="http://schemas.openxmlformats.org/officeDocument/2006/relationships">
+  <p:cSld>
+    <p:spTree>
+      <p:nvGrpSpPr>
+        <p:cNvPr id="1" name=""/>
+        <p:cNvGrpSpPr/>
+        <p:nvPr/>
+      </p:nvGrpSpPr>
+      <p:grpSpPr/>
+      <p:sp>
+        <p:nvSpPr>
+          <p:cNvPr id="2" name="Rectangle 1"/>
+          <p:cNvSpPr/>
+          <p:nvPr/>
+        </p:nvSpPr>
+        <p:spPr>
+          <a:xfrm>
+            <a:off x="0" y="0"/>
+            <a:ext cx="12191695" cy="6858000"/>
+          </a:xfrm>
+          <a:prstGeom prst="rect">
+            <a:avLst/>
+          </a:prstGeom>
+          <a:solidFill>
+            <a:srgbClr val="F8FAFC"/>
+          </a:solidFill>
+          <a:ln>
+            <a:noFill/>
+          </a:ln>
+        </p:spPr>
+        <p:style>
+          <a:lnRef idx="1">
+            <a:schemeClr val="accent1"/>
+          </a:lnRef>
+          <a:fillRef idx="3">
+            <a:schemeClr val="accent1"/>
+          </a:fillRef>
+          <a:effectRef idx="2">
+            <a:schemeClr val="accent1"/>
+          </a:effectRef>
+          <a:fontRef idx="minor">
+            <a:schemeClr val="lt1"/>
+          </a:fontRef>
+        </p:style>
+        <p:txBody>
+          <a:bodyPr rtlCol="0" anchor="ctr"/>
+          <a:lstStyle/>
+          <a:p>
+            <a:pPr algn="ctr"/>
+          </a:p>
+        </p:txBody>
+      </p:sp>
+      <p:sp>
+        <p:nvSpPr>
+          <p:cNvPr id="3" name="Rectangle 2"/>
+          <p:cNvSpPr/>
+          <p:nvPr/>
+        </p:nvSpPr>
+        <p:spPr>
+          <a:xfrm>
+            <a:off x="0" y="0"/>
+            <a:ext cx="12191695" cy="73152"/>
+          </a:xfrm>
+          <a:prstGeom prst="rect">
+            <a:avLst/>
+          </a:prstGeom>
+          <a:solidFill>
+            <a:srgbClr val="2563EB"/>
+          </a:solidFill>
+          <a:ln>
+            <a:noFill/>
+          </a:ln>
+        </p:spPr>
+        <p:style>
+          <a:lnRef idx="1">
+            <a:schemeClr val="accent1"/>
+          </a:lnRef>
+          <a:fillRef idx="3">
+            <a:schemeClr val="accent1"/>
+          </a:fillRef>
+          <a:effectRef idx="2">
+            <a:schemeClr val="accent1"/>
+          </a:effectRef>
+          <a:fontRef idx="minor">
+            <a:schemeClr val="lt1"/>
+          </a:fontRef>
+        </p:style>
+        <p:txBody>
+          <a:bodyPr rtlCol="0" anchor="ctr"/>
+          <a:lstStyle/>
+          <a:p>
+            <a:pPr algn="ctr"/>
+          </a:p>
+        </p:txBody>
+      </p:sp>
+      <p:sp>
+        <p:nvSpPr>
+          <p:cNvPr id="4" name="TextBox 3"/>
+          <p:cNvSpPr txBox="1"/>
+          <p:nvPr/>
+        </p:nvSpPr>
+        <p:spPr>
+          <a:xfrm>
+            <a:off x="438912" y="182880"/>
+            <a:ext cx="9601200" cy="256032"/>
+          </a:xfrm>
+          <a:prstGeom prst="rect">
+            <a:avLst/>
+          </a:prstGeom>
+          <a:noFill/>
+        </p:spPr>
+        <p:txBody>
+          <a:bodyPr wrap="square" lIns="0" rIns="0" tIns="0" bIns="0" anchor="t"/>
+          <a:lstStyle/>
+          <a:p>
+            <a:pPr algn="l">
+              <a:lnSpc>
+                <a:spcPct val="105000"/>
+              </a:lnSpc>
+              <a:spcBef>
+                <a:spcPts val="0"/>
+              </a:spcBef>
+              <a:spcAft>
+                <a:spcPts val="0"/>
+              </a:spcAft>
+            </a:pPr>
+            <a:r>
+              <a:rPr sz="1200" b="1">
+                <a:solidFill>
+                  <a:srgbClr val="0F766E"/>
+                </a:solidFill>
+                <a:latin typeface="Calibri"/>
+                <a:cs typeface="Calibri"/>
+                <a:ea typeface="Calibri"/>
+              </a:rPr>
+              <a:t>ТЕМА 2   ·   EDTECH И ПЛАТФОРМЫ</a:t>
+            </a:r>
+          </a:p>
+        </p:txBody>
+      </p:sp>
+      <p:sp>
+        <p:nvSpPr>
+          <p:cNvPr id="5" name="TextBox 4"/>
+          <p:cNvSpPr txBox="1"/>
+          <p:nvPr/>
+        </p:nvSpPr>
+        <p:spPr>
+          <a:xfrm>
+            <a:off x="420624" y="420624"/>
+            <a:ext cx="11338560" cy="566928"/>
+          </a:xfrm>
+          <a:prstGeom prst="rect">
+            <a:avLst/>
+          </a:prstGeom>
+          <a:noFill/>
+        </p:spPr>
+        <p:txBody>
+          <a:bodyPr wrap="square" lIns="0" rIns="0" tIns="0" bIns="0" anchor="t"/>
+          <a:lstStyle/>
+          <a:p>
+            <a:pPr algn="l">
+              <a:lnSpc>
+                <a:spcPct val="105000"/>
+              </a:lnSpc>
+              <a:spcBef>
+                <a:spcPts val="0"/>
+              </a:spcBef>
+              <a:spcAft>
+                <a:spcPts val="0"/>
+              </a:spcAft>
+            </a:pPr>
+            <a:r>
+              <a:rPr sz="2800" b="1">
+                <a:solidFill>
+                  <a:srgbClr val="0F172A"/>
+                </a:solidFill>
+                <a:latin typeface="Calibri"/>
+                <a:cs typeface="Calibri"/>
+                <a:ea typeface="Calibri"/>
+              </a:rPr>
+              <a:t>Самостоятельная работа</a:t>
+            </a:r>
+          </a:p>
+        </p:txBody>
+      </p:sp>
+      <p:sp>
+        <p:nvSpPr>
+          <p:cNvPr id="6" name="Rectangle 5"/>
+          <p:cNvSpPr/>
+          <p:nvPr/>
+        </p:nvSpPr>
+        <p:spPr>
+          <a:xfrm>
+            <a:off x="0" y="6601968"/>
+            <a:ext cx="12191695" cy="256032"/>
+          </a:xfrm>
+          <a:prstGeom prst="rect">
+            <a:avLst/>
+          </a:prstGeom>
+          <a:solidFill>
+            <a:srgbClr val="FFFFFF"/>
+          </a:solidFill>
+          <a:ln>
+            <a:noFill/>
+          </a:ln>
+        </p:spPr>
+        <p:style>
+          <a:lnRef idx="1">
+            <a:schemeClr val="accent1"/>
+          </a:lnRef>
+          <a:fillRef idx="3">
+            <a:schemeClr val="accent1"/>
+          </a:fillRef>
+          <a:effectRef idx="2">
+            <a:schemeClr val="accent1"/>
+          </a:effectRef>
+          <a:fontRef idx="minor">
+            <a:schemeClr val="lt1"/>
+          </a:fontRef>
+        </p:style>
+        <p:txBody>
+          <a:bodyPr rtlCol="0" anchor="ctr"/>
+          <a:lstStyle/>
+          <a:p>
+            <a:pPr algn="ctr"/>
+          </a:p>
+        </p:txBody>
+      </p:sp>
+      <p:sp>
+        <p:nvSpPr>
+          <p:cNvPr id="7" name="Rectangle 6"/>
+          <p:cNvSpPr/>
+          <p:nvPr/>
+        </p:nvSpPr>
+        <p:spPr>
+          <a:xfrm>
+            <a:off x="0" y="6601968"/>
+            <a:ext cx="12191695" cy="10972"/>
+          </a:xfrm>
+          <a:prstGeom prst="rect">
+            <a:avLst/>
+          </a:prstGeom>
+          <a:solidFill>
+            <a:srgbClr val="E2E8F0"/>
+          </a:solidFill>
+          <a:ln>
+            <a:noFill/>
+          </a:ln>
+        </p:spPr>
+        <p:style>
+          <a:lnRef idx="1">
+            <a:schemeClr val="accent1"/>
+          </a:lnRef>
+          <a:fillRef idx="3">
+            <a:schemeClr val="accent1"/>
+          </a:fillRef>
+          <a:effectRef idx="2">
+            <a:schemeClr val="accent1"/>
+          </a:effectRef>
+          <a:fontRef idx="minor">
+            <a:schemeClr val="lt1"/>
+          </a:fontRef>
+        </p:style>
+        <p:txBody>
+          <a:bodyPr rtlCol="0" anchor="ctr"/>
+          <a:lstStyle/>
+          <a:p>
+            <a:pPr algn="ctr"/>
+          </a:p>
+        </p:txBody>
+      </p:sp>
+      <p:sp>
+        <p:nvSpPr>
+          <p:cNvPr id="8" name="TextBox 7"/>
+          <p:cNvSpPr txBox="1"/>
+          <p:nvPr/>
+        </p:nvSpPr>
+        <p:spPr>
+          <a:xfrm>
+            <a:off x="438912" y="6620256"/>
+            <a:ext cx="7498079" cy="219456"/>
+          </a:xfrm>
+          <a:prstGeom prst="rect">
+            <a:avLst/>
+          </a:prstGeom>
+          <a:noFill/>
+        </p:spPr>
+        <p:txBody>
+          <a:bodyPr wrap="square" lIns="0" rIns="0" tIns="0" bIns="0" anchor="ctr"/>
+          <a:lstStyle/>
+          <a:p>
+            <a:pPr algn="l">
+              <a:lnSpc>
+                <a:spcPct val="105000"/>
+              </a:lnSpc>
+              <a:spcBef>
+                <a:spcPts val="0"/>
+              </a:spcBef>
+              <a:spcAft>
+                <a:spcPts val="0"/>
+              </a:spcAft>
+            </a:pPr>
+            <a:r>
+              <a:rPr sz="1100" b="0">
+                <a:solidFill>
+                  <a:srgbClr val="475569"/>
+                </a:solidFill>
+                <a:latin typeface="Calibri"/>
+                <a:cs typeface="Calibri"/>
+                <a:ea typeface="Calibri"/>
+              </a:rPr>
+              <a:t>Основы проектирования цифровых образовательных ресурсов</a:t>
+            </a:r>
+          </a:p>
+        </p:txBody>
+      </p:sp>
+      <p:sp>
+        <p:nvSpPr>
+          <p:cNvPr id="9" name="TextBox 8"/>
+          <p:cNvSpPr txBox="1"/>
+          <p:nvPr/>
+        </p:nvSpPr>
+        <p:spPr>
+          <a:xfrm>
+            <a:off x="9418320" y="6620256"/>
+            <a:ext cx="2331720" cy="219456"/>
+          </a:xfrm>
+          <a:prstGeom prst="rect">
+            <a:avLst/>
+          </a:prstGeom>
+          <a:noFill/>
+        </p:spPr>
+        <p:txBody>
+          <a:bodyPr wrap="square" lIns="0" rIns="0" tIns="0" bIns="0" anchor="ctr"/>
+          <a:lstStyle/>
+          <a:p>
+            <a:pPr algn="r">
+              <a:lnSpc>
+                <a:spcPct val="105000"/>
+              </a:lnSpc>
+              <a:spcBef>
+                <a:spcPts val="0"/>
+              </a:spcBef>
+              <a:spcAft>
+                <a:spcPts val="0"/>
+              </a:spcAft>
+            </a:pPr>
+            <a:r>
+              <a:rPr sz="1100" b="1">
+                <a:solidFill>
+                  <a:srgbClr val="475569"/>
+                </a:solidFill>
+                <a:latin typeface="Calibri"/>
+                <a:cs typeface="Calibri"/>
+                <a:ea typeface="Calibri"/>
+              </a:rPr>
+              <a:t>16  /  16</a:t>
             </a:r>
           </a:p>
         </p:txBody>
@@ -9140,7 +11593,7 @@
                 <a:cs typeface="Calibri"/>
                 <a:ea typeface="Calibri"/>
               </a:rPr>
-              <a:t>02  /  14</a:t>
+              <a:t>02  /  16</a:t>
             </a:r>
           </a:p>
         </p:txBody>
@@ -10050,7 +12503,7 @@
                 <a:cs typeface="Calibri"/>
                 <a:ea typeface="Calibri"/>
               </a:rPr>
-              <a:t>03  /  14</a:t>
+              <a:t>03  /  16</a:t>
             </a:r>
           </a:p>
         </p:txBody>
@@ -11200,7 +13653,7 @@
                 <a:cs typeface="Calibri"/>
                 <a:ea typeface="Calibri"/>
               </a:rPr>
-              <a:t>04  /  14</a:t>
+              <a:t>04  /  16</a:t>
             </a:r>
           </a:p>
         </p:txBody>
@@ -11891,7 +14344,7 @@
                 <a:cs typeface="Calibri"/>
                 <a:ea typeface="Calibri"/>
               </a:rPr>
-              <a:t>05  /  14</a:t>
+              <a:t>05  /  16</a:t>
             </a:r>
           </a:p>
         </p:txBody>
@@ -13266,7 +15719,7 @@
                 <a:cs typeface="Calibri"/>
                 <a:ea typeface="Calibri"/>
               </a:rPr>
-              <a:t>06  /  14</a:t>
+              <a:t>06  /  16</a:t>
             </a:r>
           </a:p>
         </p:txBody>
@@ -14482,7 +16935,7 @@
                 <a:cs typeface="Calibri"/>
                 <a:ea typeface="Calibri"/>
               </a:rPr>
-              <a:t>07  /  14</a:t>
+              <a:t>07  /  16</a:t>
             </a:r>
           </a:p>
         </p:txBody>
@@ -15926,7 +18379,7 @@
                 <a:cs typeface="Calibri"/>
                 <a:ea typeface="Calibri"/>
               </a:rPr>
-              <a:t>08  /  14</a:t>
+              <a:t>08  /  16</a:t>
             </a:r>
           </a:p>
         </p:txBody>
@@ -16927,7 +19380,7 @@
                 <a:cs typeface="Calibri"/>
                 <a:ea typeface="Calibri"/>
               </a:rPr>
-              <a:t>09  /  14</a:t>
+              <a:t>09  /  16</a:t>
             </a:r>
           </a:p>
         </p:txBody>
